--- a/カードデザイン/20260324_デザイン案-理事配布用.pptx
+++ b/カードデザイン/20260324_デザイン案-理事配布用.pptx
@@ -5,12 +5,13 @@
     <p:sldMasterId id="2147483672" r:id="rId1"/>
   </p:sldMasterIdLst>
   <p:notesMasterIdLst>
-    <p:notesMasterId r:id="rId5"/>
+    <p:notesMasterId r:id="rId6"/>
   </p:notesMasterIdLst>
   <p:sldIdLst>
     <p:sldId id="283" r:id="rId2"/>
-    <p:sldId id="284" r:id="rId3"/>
-    <p:sldId id="292" r:id="rId4"/>
+    <p:sldId id="292" r:id="rId3"/>
+    <p:sldId id="293" r:id="rId4"/>
+    <p:sldId id="284" r:id="rId5"/>
   </p:sldIdLst>
   <p:sldSz cx="3095625" cy="1944688"/>
   <p:notesSz cx="7104063" cy="10234613"/>
@@ -4270,6 +4271,1016 @@
         <p:cNvPr id="1" name="">
           <a:extLst>
             <a:ext uri="{FF2B5EF4-FFF2-40B4-BE49-F238E27FC236}">
+              <a16:creationId xmlns:a16="http://schemas.microsoft.com/office/drawing/2014/main" id="{D079A0A6-C627-E1EF-2C33-DA04DC22B202}"/>
+            </a:ext>
+          </a:extLst>
+        </p:cNvPr>
+        <p:cNvGrpSpPr/>
+        <p:nvPr/>
+      </p:nvGrpSpPr>
+      <p:grpSpPr>
+        <a:xfrm>
+          <a:off x="0" y="0"/>
+          <a:ext cx="0" cy="0"/>
+          <a:chOff x="0" y="0"/>
+          <a:chExt cx="0" cy="0"/>
+        </a:xfrm>
+      </p:grpSpPr>
+      <p:grpSp>
+        <p:nvGrpSpPr>
+          <p:cNvPr id="4" name="グループ化 3">
+            <a:extLst>
+              <a:ext uri="{FF2B5EF4-FFF2-40B4-BE49-F238E27FC236}">
+                <a16:creationId xmlns:a16="http://schemas.microsoft.com/office/drawing/2014/main" id="{3A011A14-8162-9C9E-72DA-74130FD97DCF}"/>
+              </a:ext>
+            </a:extLst>
+          </p:cNvPr>
+          <p:cNvGrpSpPr/>
+          <p:nvPr/>
+        </p:nvGrpSpPr>
+        <p:grpSpPr>
+          <a:xfrm>
+            <a:off x="-1" y="-5087"/>
+            <a:ext cx="3095625" cy="1949775"/>
+            <a:chOff x="-1" y="-5087"/>
+            <a:chExt cx="3095625" cy="1949775"/>
+          </a:xfrm>
+        </p:grpSpPr>
+        <p:sp>
+          <p:nvSpPr>
+            <p:cNvPr id="6" name="四角形: 角を丸くする 5">
+              <a:extLst>
+                <a:ext uri="{FF2B5EF4-FFF2-40B4-BE49-F238E27FC236}">
+                  <a16:creationId xmlns:a16="http://schemas.microsoft.com/office/drawing/2014/main" id="{60D33596-4E8C-FA2E-94F2-F225C44EF270}"/>
+                </a:ext>
+              </a:extLst>
+            </p:cNvPr>
+            <p:cNvSpPr/>
+            <p:nvPr/>
+          </p:nvSpPr>
+          <p:spPr>
+            <a:xfrm>
+              <a:off x="-1" y="-5087"/>
+              <a:ext cx="3095625" cy="1949774"/>
+            </a:xfrm>
+            <a:prstGeom prst="roundRect">
+              <a:avLst>
+                <a:gd name="adj" fmla="val 0"/>
+              </a:avLst>
+            </a:prstGeom>
+            <a:solidFill>
+              <a:schemeClr val="bg1"/>
+            </a:solidFill>
+            <a:ln>
+              <a:noFill/>
+            </a:ln>
+          </p:spPr>
+          <p:style>
+            <a:lnRef idx="2">
+              <a:schemeClr val="accent1">
+                <a:shade val="15000"/>
+              </a:schemeClr>
+            </a:lnRef>
+            <a:fillRef idx="1">
+              <a:schemeClr val="accent1"/>
+            </a:fillRef>
+            <a:effectRef idx="0">
+              <a:schemeClr val="accent1"/>
+            </a:effectRef>
+            <a:fontRef idx="minor">
+              <a:schemeClr val="lt1"/>
+            </a:fontRef>
+          </p:style>
+          <p:txBody>
+            <a:bodyPr lIns="0" tIns="0" rIns="0" bIns="0" rtlCol="0" anchor="ctr"/>
+            <a:lstStyle/>
+            <a:p>
+              <a:pPr algn="ctr"/>
+              <a:endParaRPr kumimoji="1" lang="ja-JP" altLang="en-US" sz="600" dirty="0">
+                <a:solidFill>
+                  <a:schemeClr val="tx1"/>
+                </a:solidFill>
+                <a:latin typeface="UD デジタル 教科書体 NP-R" panose="020B0400000000000000" pitchFamily="18" charset="-128"/>
+                <a:ea typeface="UD デジタル 教科書体 NP-R" panose="020B0400000000000000" pitchFamily="18" charset="-128"/>
+              </a:endParaRPr>
+            </a:p>
+          </p:txBody>
+        </p:sp>
+        <p:sp>
+          <p:nvSpPr>
+            <p:cNvPr id="27" name="四角形: 角を丸くする 26">
+              <a:extLst>
+                <a:ext uri="{FF2B5EF4-FFF2-40B4-BE49-F238E27FC236}">
+                  <a16:creationId xmlns:a16="http://schemas.microsoft.com/office/drawing/2014/main" id="{5720E82F-A8F7-2F33-47EE-2CB001A1ABD0}"/>
+                </a:ext>
+              </a:extLst>
+            </p:cNvPr>
+            <p:cNvSpPr/>
+            <p:nvPr/>
+          </p:nvSpPr>
+          <p:spPr>
+            <a:xfrm>
+              <a:off x="-1" y="0"/>
+              <a:ext cx="3095625" cy="1944688"/>
+            </a:xfrm>
+            <a:prstGeom prst="roundRect">
+              <a:avLst>
+                <a:gd name="adj" fmla="val 13559"/>
+              </a:avLst>
+            </a:prstGeom>
+            <a:noFill/>
+            <a:ln w="6350">
+              <a:noFill/>
+            </a:ln>
+            <a:effectLst/>
+          </p:spPr>
+          <p:style>
+            <a:lnRef idx="2">
+              <a:schemeClr val="accent1">
+                <a:shade val="15000"/>
+              </a:schemeClr>
+            </a:lnRef>
+            <a:fillRef idx="1">
+              <a:schemeClr val="accent1"/>
+            </a:fillRef>
+            <a:effectRef idx="0">
+              <a:schemeClr val="accent1"/>
+            </a:effectRef>
+            <a:fontRef idx="minor">
+              <a:schemeClr val="lt1"/>
+            </a:fontRef>
+          </p:style>
+          <p:txBody>
+            <a:bodyPr wrap="square" lIns="72000" tIns="36000" rIns="72000" bIns="0" rtlCol="0" anchor="b">
+              <a:noAutofit/>
+            </a:bodyPr>
+            <a:lstStyle/>
+            <a:p>
+              <a:pPr algn="ctr"/>
+              <a:endParaRPr kumimoji="1" lang="ja-JP" altLang="en-US" sz="600" dirty="0">
+                <a:solidFill>
+                  <a:schemeClr val="tx1"/>
+                </a:solidFill>
+                <a:latin typeface="UD デジタル 教科書体 NP-R" panose="02020400000000000000" pitchFamily="18" charset="-128"/>
+                <a:ea typeface="UD デジタル 教科書体 NP-R" panose="02020400000000000000" pitchFamily="18" charset="-128"/>
+              </a:endParaRPr>
+            </a:p>
+          </p:txBody>
+        </p:sp>
+        <p:sp>
+          <p:nvSpPr>
+            <p:cNvPr id="9" name="四角形: 角を丸くする 8">
+              <a:extLst>
+                <a:ext uri="{FF2B5EF4-FFF2-40B4-BE49-F238E27FC236}">
+                  <a16:creationId xmlns:a16="http://schemas.microsoft.com/office/drawing/2014/main" id="{39C7CB0D-A617-A539-722C-F7B2B115C35C}"/>
+                </a:ext>
+              </a:extLst>
+            </p:cNvPr>
+            <p:cNvSpPr/>
+            <p:nvPr/>
+          </p:nvSpPr>
+          <p:spPr>
+            <a:xfrm>
+              <a:off x="52384" y="86414"/>
+              <a:ext cx="2990852" cy="1165609"/>
+            </a:xfrm>
+            <a:prstGeom prst="roundRect">
+              <a:avLst>
+                <a:gd name="adj" fmla="val 14805"/>
+              </a:avLst>
+            </a:prstGeom>
+            <a:blipFill dpi="0" rotWithShape="1">
+              <a:blip r:embed="rId2"/>
+              <a:srcRect/>
+              <a:stretch>
+                <a:fillRect/>
+              </a:stretch>
+            </a:blipFill>
+            <a:ln w="171450">
+              <a:noFill/>
+            </a:ln>
+            <a:effectLst>
+              <a:glow>
+                <a:schemeClr val="bg1"/>
+              </a:glow>
+              <a:outerShdw dist="12700" sx="1000" sy="1000" algn="ctr" rotWithShape="0">
+                <a:srgbClr val="000000"/>
+              </a:outerShdw>
+              <a:softEdge rad="63500"/>
+            </a:effectLst>
+          </p:spPr>
+          <p:style>
+            <a:lnRef idx="2">
+              <a:schemeClr val="accent1">
+                <a:shade val="15000"/>
+              </a:schemeClr>
+            </a:lnRef>
+            <a:fillRef idx="1">
+              <a:schemeClr val="accent1"/>
+            </a:fillRef>
+            <a:effectRef idx="0">
+              <a:schemeClr val="accent1"/>
+            </a:effectRef>
+            <a:fontRef idx="minor">
+              <a:schemeClr val="lt1"/>
+            </a:fontRef>
+          </p:style>
+          <p:txBody>
+            <a:bodyPr rtlCol="0" anchor="ctr"/>
+            <a:lstStyle/>
+            <a:p>
+              <a:pPr algn="ctr"/>
+              <a:endParaRPr lang="ja-JP" altLang="en-US"/>
+            </a:p>
+          </p:txBody>
+        </p:sp>
+        <p:sp>
+          <p:nvSpPr>
+            <p:cNvPr id="16" name="四角形: 角を丸くする 15">
+              <a:extLst>
+                <a:ext uri="{FF2B5EF4-FFF2-40B4-BE49-F238E27FC236}">
+                  <a16:creationId xmlns:a16="http://schemas.microsoft.com/office/drawing/2014/main" id="{DA33354A-9C8E-023E-9E55-D19F0931C7E7}"/>
+                </a:ext>
+              </a:extLst>
+            </p:cNvPr>
+            <p:cNvSpPr/>
+            <p:nvPr/>
+          </p:nvSpPr>
+          <p:spPr>
+            <a:xfrm>
+              <a:off x="234235" y="250086"/>
+              <a:ext cx="2627152" cy="843154"/>
+            </a:xfrm>
+            <a:prstGeom prst="roundRect">
+              <a:avLst>
+                <a:gd name="adj" fmla="val 13559"/>
+              </a:avLst>
+            </a:prstGeom>
+            <a:solidFill>
+              <a:schemeClr val="bg1"/>
+            </a:solidFill>
+            <a:ln w="6350">
+              <a:noFill/>
+            </a:ln>
+            <a:effectLst/>
+          </p:spPr>
+          <p:style>
+            <a:lnRef idx="2">
+              <a:schemeClr val="accent1">
+                <a:shade val="15000"/>
+              </a:schemeClr>
+            </a:lnRef>
+            <a:fillRef idx="1">
+              <a:schemeClr val="accent1"/>
+            </a:fillRef>
+            <a:effectRef idx="0">
+              <a:schemeClr val="accent1"/>
+            </a:effectRef>
+            <a:fontRef idx="minor">
+              <a:schemeClr val="lt1"/>
+            </a:fontRef>
+          </p:style>
+          <p:txBody>
+            <a:bodyPr wrap="square" lIns="72000" tIns="36000" rIns="72000" bIns="0" rtlCol="0" anchor="b">
+              <a:noAutofit/>
+            </a:bodyPr>
+            <a:lstStyle/>
+            <a:p>
+              <a:pPr algn="ctr"/>
+              <a:r>
+                <a:rPr kumimoji="1" lang="ja-JP" altLang="en-US" sz="500" dirty="0">
+                  <a:solidFill>
+                    <a:schemeClr val="tx1"/>
+                  </a:solidFill>
+                  <a:latin typeface="UD デジタル 教科書体 NP-R" panose="02020400000000000000" pitchFamily="18" charset="-128"/>
+                  <a:ea typeface="UD デジタル 教科書体 NP-R" panose="02020400000000000000" pitchFamily="18" charset="-128"/>
+                </a:rPr>
+                <a:t>本カードを破損・紛失された場合、または使用期限を過ぎた場合は、お品ものを</a:t>
+              </a:r>
+              <a:endParaRPr kumimoji="1" lang="en-US" altLang="ja-JP" sz="500" dirty="0">
+                <a:solidFill>
+                  <a:schemeClr val="tx1"/>
+                </a:solidFill>
+                <a:latin typeface="UD デジタル 教科書体 NP-R" panose="02020400000000000000" pitchFamily="18" charset="-128"/>
+                <a:ea typeface="UD デジタル 教科書体 NP-R" panose="02020400000000000000" pitchFamily="18" charset="-128"/>
+              </a:endParaRPr>
+            </a:p>
+            <a:p>
+              <a:pPr algn="ctr"/>
+              <a:r>
+                <a:rPr kumimoji="1" lang="ja-JP" altLang="en-US" sz="500" dirty="0">
+                  <a:solidFill>
+                    <a:schemeClr val="tx1"/>
+                  </a:solidFill>
+                  <a:latin typeface="UD デジタル 教科書体 NP-R" panose="02020400000000000000" pitchFamily="18" charset="-128"/>
+                  <a:ea typeface="UD デジタル 教科書体 NP-R" panose="02020400000000000000" pitchFamily="18" charset="-128"/>
+                </a:rPr>
+                <a:t>  ご提供できかねますので、あらかじめご了承くださいますようお願いいたします。</a:t>
+              </a:r>
+            </a:p>
+          </p:txBody>
+        </p:sp>
+        <p:sp>
+          <p:nvSpPr>
+            <p:cNvPr id="5" name="四角形: 角を丸くする 4">
+              <a:extLst>
+                <a:ext uri="{FF2B5EF4-FFF2-40B4-BE49-F238E27FC236}">
+                  <a16:creationId xmlns:a16="http://schemas.microsoft.com/office/drawing/2014/main" id="{E41946D8-7389-75F2-4C11-940CF115873C}"/>
+                </a:ext>
+              </a:extLst>
+            </p:cNvPr>
+            <p:cNvSpPr/>
+            <p:nvPr/>
+          </p:nvSpPr>
+          <p:spPr>
+            <a:xfrm>
+              <a:off x="299236" y="559911"/>
+              <a:ext cx="564212" cy="211760"/>
+            </a:xfrm>
+            <a:prstGeom prst="roundRect">
+              <a:avLst>
+                <a:gd name="adj" fmla="val 6665"/>
+              </a:avLst>
+            </a:prstGeom>
+            <a:solidFill>
+              <a:schemeClr val="bg1"/>
+            </a:solidFill>
+            <a:ln>
+              <a:noFill/>
+            </a:ln>
+          </p:spPr>
+          <p:style>
+            <a:lnRef idx="2">
+              <a:schemeClr val="accent1">
+                <a:shade val="15000"/>
+              </a:schemeClr>
+            </a:lnRef>
+            <a:fillRef idx="1">
+              <a:schemeClr val="accent1"/>
+            </a:fillRef>
+            <a:effectRef idx="0">
+              <a:schemeClr val="accent1"/>
+            </a:effectRef>
+            <a:fontRef idx="minor">
+              <a:schemeClr val="lt1"/>
+            </a:fontRef>
+          </p:style>
+          <p:txBody>
+            <a:bodyPr lIns="0" tIns="0" rIns="0" bIns="0" rtlCol="0" anchor="ctr"/>
+            <a:lstStyle/>
+            <a:p>
+              <a:pPr algn="ctr"/>
+              <a:r>
+                <a:rPr kumimoji="1" lang="en-US" altLang="ja-JP" sz="800" dirty="0">
+                  <a:solidFill>
+                    <a:schemeClr val="tx1"/>
+                  </a:solidFill>
+                  <a:latin typeface="UD デジタル 教科書体 NP-R" panose="02020400000000000000" pitchFamily="18" charset="-128"/>
+                  <a:ea typeface="UD デジタル 教科書体 NP-R" panose="02020400000000000000" pitchFamily="18" charset="-128"/>
+                </a:rPr>
+                <a:t>PINCODE</a:t>
+              </a:r>
+            </a:p>
+          </p:txBody>
+        </p:sp>
+        <p:sp>
+          <p:nvSpPr>
+            <p:cNvPr id="18" name="四角形: 角を丸くする 17">
+              <a:extLst>
+                <a:ext uri="{FF2B5EF4-FFF2-40B4-BE49-F238E27FC236}">
+                  <a16:creationId xmlns:a16="http://schemas.microsoft.com/office/drawing/2014/main" id="{4CDE62F3-3BB3-74A0-99E7-D86D84B26F9B}"/>
+                </a:ext>
+              </a:extLst>
+            </p:cNvPr>
+            <p:cNvSpPr/>
+            <p:nvPr/>
+          </p:nvSpPr>
+          <p:spPr>
+            <a:xfrm>
+              <a:off x="216692" y="1346585"/>
+              <a:ext cx="2662238" cy="302565"/>
+            </a:xfrm>
+            <a:prstGeom prst="roundRect">
+              <a:avLst>
+                <a:gd name="adj" fmla="val 17073"/>
+              </a:avLst>
+            </a:prstGeom>
+            <a:noFill/>
+            <a:ln w="6350">
+              <a:solidFill>
+                <a:schemeClr val="tx1"/>
+              </a:solidFill>
+            </a:ln>
+            <a:effectLst/>
+          </p:spPr>
+          <p:style>
+            <a:lnRef idx="2">
+              <a:schemeClr val="accent1">
+                <a:shade val="15000"/>
+              </a:schemeClr>
+            </a:lnRef>
+            <a:fillRef idx="1">
+              <a:schemeClr val="accent1"/>
+            </a:fillRef>
+            <a:effectRef idx="0">
+              <a:schemeClr val="accent1"/>
+            </a:effectRef>
+            <a:fontRef idx="minor">
+              <a:schemeClr val="lt1"/>
+            </a:fontRef>
+          </p:style>
+          <p:txBody>
+            <a:bodyPr rtlCol="0" anchor="ctr"/>
+            <a:lstStyle/>
+            <a:p>
+              <a:pPr algn="ctr"/>
+              <a:r>
+                <a:rPr kumimoji="1" lang="en-US" altLang="ja-JP" sz="600" dirty="0">
+                  <a:solidFill>
+                    <a:schemeClr val="tx1"/>
+                  </a:solidFill>
+                  <a:latin typeface="UD デジタル 教科書体 NP-R" panose="02020400000000000000" pitchFamily="18" charset="-128"/>
+                  <a:ea typeface="UD デジタル 教科書体 NP-R" panose="02020400000000000000" pitchFamily="18" charset="-128"/>
+                </a:rPr>
+                <a:t>[</a:t>
+              </a:r>
+              <a:r>
+                <a:rPr kumimoji="1" lang="ja-JP" altLang="en-US" sz="600" dirty="0">
+                  <a:solidFill>
+                    <a:schemeClr val="tx1"/>
+                  </a:solidFill>
+                  <a:latin typeface="UD デジタル 教科書体 NP-R" panose="02020400000000000000" pitchFamily="18" charset="-128"/>
+                  <a:ea typeface="UD デジタル 教科書体 NP-R" panose="02020400000000000000" pitchFamily="18" charset="-128"/>
+                </a:rPr>
+                <a:t>お問い合わせ</a:t>
+              </a:r>
+              <a:r>
+                <a:rPr kumimoji="1" lang="en-US" altLang="ja-JP" sz="600" dirty="0">
+                  <a:solidFill>
+                    <a:schemeClr val="tx1"/>
+                  </a:solidFill>
+                  <a:latin typeface="UD デジタル 教科書体 NP-R" panose="02020400000000000000" pitchFamily="18" charset="-128"/>
+                  <a:ea typeface="UD デジタル 教科書体 NP-R" panose="02020400000000000000" pitchFamily="18" charset="-128"/>
+                </a:rPr>
+                <a:t>]</a:t>
+              </a:r>
+            </a:p>
+            <a:p>
+              <a:pPr algn="ctr"/>
+              <a:r>
+                <a:rPr kumimoji="1" lang="ja-JP" altLang="en-US" sz="600" dirty="0">
+                  <a:solidFill>
+                    <a:schemeClr val="tx1"/>
+                  </a:solidFill>
+                  <a:latin typeface="UD デジタル 教科書体 NP-R" panose="02020400000000000000" pitchFamily="18" charset="-128"/>
+                  <a:ea typeface="UD デジタル 教科書体 NP-R" panose="02020400000000000000" pitchFamily="18" charset="-128"/>
+                </a:rPr>
+                <a:t>秋田大学総務企画部広報課</a:t>
+              </a:r>
+            </a:p>
+            <a:p>
+              <a:pPr algn="ctr"/>
+              <a:r>
+                <a:rPr kumimoji="1" lang="ja-JP" altLang="en-US" sz="600" dirty="0">
+                  <a:solidFill>
+                    <a:schemeClr val="tx1"/>
+                  </a:solidFill>
+                  <a:latin typeface="UD デジタル 教科書体 NP-R" panose="02020400000000000000" pitchFamily="18" charset="-128"/>
+                  <a:ea typeface="UD デジタル 教科書体 NP-R" panose="02020400000000000000" pitchFamily="18" charset="-128"/>
+                </a:rPr>
+                <a:t>電話</a:t>
+              </a:r>
+              <a:r>
+                <a:rPr kumimoji="1" lang="ja-JP" altLang="en-US" sz="600">
+                  <a:solidFill>
+                    <a:schemeClr val="tx1"/>
+                  </a:solidFill>
+                  <a:latin typeface="UD デジタル 教科書体 NP-R" panose="02020400000000000000" pitchFamily="18" charset="-128"/>
+                  <a:ea typeface="UD デジタル 教科書体 NP-R" panose="02020400000000000000" pitchFamily="18" charset="-128"/>
+                </a:rPr>
+                <a:t>：</a:t>
+              </a:r>
+              <a:r>
+                <a:rPr kumimoji="1" lang="en-US" altLang="ja-JP" sz="600" dirty="0">
+                  <a:solidFill>
+                    <a:schemeClr val="tx1"/>
+                  </a:solidFill>
+                  <a:latin typeface="UD デジタル 教科書体 NP-R" panose="02020400000000000000" pitchFamily="18" charset="-128"/>
+                  <a:ea typeface="UD デジタル 教科書体 NP-R" panose="02020400000000000000" pitchFamily="18" charset="-128"/>
+                </a:rPr>
+                <a:t>018-889-3019</a:t>
+              </a:r>
+              <a:r>
+                <a:rPr kumimoji="1" lang="ja-JP" altLang="en-US" sz="600">
+                  <a:solidFill>
+                    <a:schemeClr val="tx1"/>
+                  </a:solidFill>
+                  <a:latin typeface="UD デジタル 教科書体 NP-R" panose="02020400000000000000" pitchFamily="18" charset="-128"/>
+                  <a:ea typeface="UD デジタル 教科書体 NP-R" panose="02020400000000000000" pitchFamily="18" charset="-128"/>
+                </a:rPr>
+                <a:t>　</a:t>
+              </a:r>
+              <a:r>
+                <a:rPr kumimoji="1" lang="en-US" altLang="ja-JP" sz="600" dirty="0">
+                  <a:solidFill>
+                    <a:schemeClr val="tx1"/>
+                  </a:solidFill>
+                  <a:latin typeface="UD デジタル 教科書体 NP-R" panose="02020400000000000000" pitchFamily="18" charset="-128"/>
+                  <a:ea typeface="UD デジタル 教科書体 NP-R" panose="02020400000000000000" pitchFamily="18" charset="-128"/>
+                </a:rPr>
+                <a:t>e-mail</a:t>
+              </a:r>
+              <a:r>
+                <a:rPr kumimoji="1" lang="ja-JP" altLang="en-US" sz="600" dirty="0">
+                  <a:solidFill>
+                    <a:schemeClr val="tx1"/>
+                  </a:solidFill>
+                  <a:latin typeface="UD デジタル 教科書体 NP-R" panose="02020400000000000000" pitchFamily="18" charset="-128"/>
+                  <a:ea typeface="UD デジタル 教科書体 NP-R" panose="02020400000000000000" pitchFamily="18" charset="-128"/>
+                </a:rPr>
+                <a:t>：</a:t>
+              </a:r>
+              <a:r>
+                <a:rPr kumimoji="1" lang="en-US" altLang="ja-JP" sz="600" dirty="0">
+                  <a:solidFill>
+                    <a:schemeClr val="tx1"/>
+                  </a:solidFill>
+                  <a:latin typeface="UD デジタル 教科書体 NP-R" panose="02020400000000000000" pitchFamily="18" charset="-128"/>
+                  <a:ea typeface="UD デジタル 教科書体 NP-R" panose="02020400000000000000" pitchFamily="18" charset="-128"/>
+                </a:rPr>
+                <a:t>kouhou@jimu.akita-u.ac.jp</a:t>
+              </a:r>
+            </a:p>
+          </p:txBody>
+        </p:sp>
+        <p:sp>
+          <p:nvSpPr>
+            <p:cNvPr id="19" name="四角形: 角を丸くする 18">
+              <a:extLst>
+                <a:ext uri="{FF2B5EF4-FFF2-40B4-BE49-F238E27FC236}">
+                  <a16:creationId xmlns:a16="http://schemas.microsoft.com/office/drawing/2014/main" id="{31B99F23-31CE-7A6B-4F83-670E40C768CA}"/>
+                </a:ext>
+              </a:extLst>
+            </p:cNvPr>
+            <p:cNvSpPr/>
+            <p:nvPr/>
+          </p:nvSpPr>
+          <p:spPr>
+            <a:xfrm>
+              <a:off x="264474" y="1746083"/>
+              <a:ext cx="2720550" cy="131546"/>
+            </a:xfrm>
+            <a:prstGeom prst="roundRect">
+              <a:avLst>
+                <a:gd name="adj" fmla="val 17073"/>
+              </a:avLst>
+            </a:prstGeom>
+            <a:noFill/>
+            <a:ln w="6350">
+              <a:noFill/>
+            </a:ln>
+            <a:effectLst/>
+          </p:spPr>
+          <p:style>
+            <a:lnRef idx="2">
+              <a:schemeClr val="accent1">
+                <a:shade val="15000"/>
+              </a:schemeClr>
+            </a:lnRef>
+            <a:fillRef idx="1">
+              <a:schemeClr val="accent1"/>
+            </a:fillRef>
+            <a:effectRef idx="0">
+              <a:schemeClr val="accent1"/>
+            </a:effectRef>
+            <a:fontRef idx="minor">
+              <a:schemeClr val="lt1"/>
+            </a:fontRef>
+          </p:style>
+          <p:txBody>
+            <a:bodyPr rtlCol="0" anchor="ctr"/>
+            <a:lstStyle/>
+            <a:p>
+              <a:pPr algn="ctr"/>
+              <a:r>
+                <a:rPr kumimoji="1" lang="ja-JP" altLang="en-US" sz="600" dirty="0">
+                  <a:solidFill>
+                    <a:schemeClr val="tx1"/>
+                  </a:solidFill>
+                  <a:latin typeface="UD デジタル 教科書体 NP-R" panose="02020400000000000000" pitchFamily="18" charset="-128"/>
+                  <a:ea typeface="UD デジタル 教科書体 NP-R" panose="02020400000000000000" pitchFamily="18" charset="-128"/>
+                </a:rPr>
+                <a:t>「名刺代わりに」は、秋田大学発ベンチャー、</a:t>
+              </a:r>
+              <a:r>
+                <a:rPr kumimoji="1" lang="en-US" altLang="ja-JP" sz="600" dirty="0">
+                  <a:solidFill>
+                    <a:schemeClr val="tx1"/>
+                  </a:solidFill>
+                  <a:latin typeface="UD デジタル 教科書体 NP-R" panose="02020400000000000000" pitchFamily="18" charset="-128"/>
+                  <a:ea typeface="UD デジタル 教科書体 NP-R" panose="02020400000000000000" pitchFamily="18" charset="-128"/>
+                </a:rPr>
+                <a:t>AUIC</a:t>
+              </a:r>
+              <a:r>
+                <a:rPr kumimoji="1" lang="ja-JP" altLang="en-US" sz="600" dirty="0">
+                  <a:solidFill>
+                    <a:schemeClr val="tx1"/>
+                  </a:solidFill>
+                  <a:latin typeface="UD デジタル 教科書体 NP-R" panose="02020400000000000000" pitchFamily="18" charset="-128"/>
+                  <a:ea typeface="UD デジタル 教科書体 NP-R" panose="02020400000000000000" pitchFamily="18" charset="-128"/>
+                </a:rPr>
+                <a:t>が提供しています。</a:t>
+              </a:r>
+              <a:endParaRPr kumimoji="1" lang="en-US" altLang="ja-JP" sz="600" dirty="0">
+                <a:solidFill>
+                  <a:schemeClr val="tx1"/>
+                </a:solidFill>
+                <a:latin typeface="UD デジタル 教科書体 NP-R" panose="02020400000000000000" pitchFamily="18" charset="-128"/>
+                <a:ea typeface="UD デジタル 教科書体 NP-R" panose="02020400000000000000" pitchFamily="18" charset="-128"/>
+              </a:endParaRPr>
+            </a:p>
+          </p:txBody>
+        </p:sp>
+        <p:sp>
+          <p:nvSpPr>
+            <p:cNvPr id="25" name="四角形: 角を丸くする 24">
+              <a:extLst>
+                <a:ext uri="{FF2B5EF4-FFF2-40B4-BE49-F238E27FC236}">
+                  <a16:creationId xmlns:a16="http://schemas.microsoft.com/office/drawing/2014/main" id="{307D546E-1FFF-E8A2-17B1-EEC4D1AACAE0}"/>
+                </a:ext>
+              </a:extLst>
+            </p:cNvPr>
+            <p:cNvSpPr/>
+            <p:nvPr/>
+          </p:nvSpPr>
+          <p:spPr>
+            <a:xfrm>
+              <a:off x="187535" y="287429"/>
+              <a:ext cx="2720550" cy="164630"/>
+            </a:xfrm>
+            <a:prstGeom prst="roundRect">
+              <a:avLst>
+                <a:gd name="adj" fmla="val 17073"/>
+              </a:avLst>
+            </a:prstGeom>
+            <a:noFill/>
+            <a:ln w="6350">
+              <a:noFill/>
+            </a:ln>
+            <a:effectLst/>
+          </p:spPr>
+          <p:style>
+            <a:lnRef idx="2">
+              <a:schemeClr val="accent1">
+                <a:shade val="15000"/>
+              </a:schemeClr>
+            </a:lnRef>
+            <a:fillRef idx="1">
+              <a:schemeClr val="accent1"/>
+            </a:fillRef>
+            <a:effectRef idx="0">
+              <a:schemeClr val="accent1"/>
+            </a:effectRef>
+            <a:fontRef idx="minor">
+              <a:schemeClr val="lt1"/>
+            </a:fontRef>
+          </p:style>
+          <p:txBody>
+            <a:bodyPr rtlCol="0" anchor="ctr"/>
+            <a:lstStyle/>
+            <a:p>
+              <a:pPr algn="ctr"/>
+              <a:r>
+                <a:rPr kumimoji="1" lang="ja-JP" altLang="en-US" sz="600" dirty="0">
+                  <a:solidFill>
+                    <a:schemeClr val="tx1"/>
+                  </a:solidFill>
+                  <a:latin typeface="UD デジタル 教科書体 NP-R" panose="02020400000000000000" pitchFamily="18" charset="-128"/>
+                  <a:ea typeface="UD デジタル 教科書体 NP-R" panose="02020400000000000000" pitchFamily="18" charset="-128"/>
+                </a:rPr>
+                <a:t>［使用期限：</a:t>
+              </a:r>
+              <a:r>
+                <a:rPr kumimoji="1" lang="en-US" altLang="ja-JP" sz="600" dirty="0">
+                  <a:solidFill>
+                    <a:schemeClr val="tx1"/>
+                  </a:solidFill>
+                  <a:latin typeface="UD デジタル 教科書体 NP-R" panose="02020400000000000000" pitchFamily="18" charset="-128"/>
+                  <a:ea typeface="UD デジタル 教科書体 NP-R" panose="02020400000000000000" pitchFamily="18" charset="-128"/>
+                </a:rPr>
+                <a:t>2027</a:t>
+              </a:r>
+              <a:r>
+                <a:rPr kumimoji="1" lang="ja-JP" altLang="en-US" sz="600" dirty="0">
+                  <a:solidFill>
+                    <a:schemeClr val="tx1"/>
+                  </a:solidFill>
+                  <a:latin typeface="UD デジタル 教科書体 NP-R" panose="02020400000000000000" pitchFamily="18" charset="-128"/>
+                  <a:ea typeface="UD デジタル 教科書体 NP-R" panose="02020400000000000000" pitchFamily="18" charset="-128"/>
+                </a:rPr>
+                <a:t> 年 </a:t>
+              </a:r>
+              <a:r>
+                <a:rPr kumimoji="1" lang="en-US" altLang="ja-JP" sz="600" dirty="0">
+                  <a:solidFill>
+                    <a:schemeClr val="tx1"/>
+                  </a:solidFill>
+                  <a:latin typeface="UD デジタル 教科書体 NP-R" panose="02020400000000000000" pitchFamily="18" charset="-128"/>
+                  <a:ea typeface="UD デジタル 教科書体 NP-R" panose="02020400000000000000" pitchFamily="18" charset="-128"/>
+                </a:rPr>
+                <a:t>3</a:t>
+              </a:r>
+              <a:r>
+                <a:rPr kumimoji="1" lang="ja-JP" altLang="en-US" sz="600" dirty="0">
+                  <a:solidFill>
+                    <a:schemeClr val="tx1"/>
+                  </a:solidFill>
+                  <a:latin typeface="UD デジタル 教科書体 NP-R" panose="02020400000000000000" pitchFamily="18" charset="-128"/>
+                  <a:ea typeface="UD デジタル 教科書体 NP-R" panose="02020400000000000000" pitchFamily="18" charset="-128"/>
+                </a:rPr>
+                <a:t> 月 </a:t>
+              </a:r>
+              <a:r>
+                <a:rPr kumimoji="1" lang="en-US" altLang="ja-JP" sz="600" dirty="0">
+                  <a:solidFill>
+                    <a:schemeClr val="tx1"/>
+                  </a:solidFill>
+                  <a:latin typeface="UD デジタル 教科書体 NP-R" panose="02020400000000000000" pitchFamily="18" charset="-128"/>
+                  <a:ea typeface="UD デジタル 教科書体 NP-R" panose="02020400000000000000" pitchFamily="18" charset="-128"/>
+                </a:rPr>
+                <a:t>31</a:t>
+              </a:r>
+              <a:r>
+                <a:rPr kumimoji="1" lang="ja-JP" altLang="en-US" sz="600" dirty="0">
+                  <a:solidFill>
+                    <a:schemeClr val="tx1"/>
+                  </a:solidFill>
+                  <a:latin typeface="UD デジタル 教科書体 NP-R" panose="02020400000000000000" pitchFamily="18" charset="-128"/>
+                  <a:ea typeface="UD デジタル 教科書体 NP-R" panose="02020400000000000000" pitchFamily="18" charset="-128"/>
+                </a:rPr>
+                <a:t> 日 </a:t>
+              </a:r>
+              <a:r>
+                <a:rPr kumimoji="1" lang="en-US" altLang="ja-JP" sz="600" dirty="0">
+                  <a:solidFill>
+                    <a:schemeClr val="tx1"/>
+                  </a:solidFill>
+                  <a:latin typeface="UD デジタル 教科書体 NP-R" panose="02020400000000000000" pitchFamily="18" charset="-128"/>
+                  <a:ea typeface="UD デジタル 教科書体 NP-R" panose="02020400000000000000" pitchFamily="18" charset="-128"/>
+                </a:rPr>
+                <a:t>23</a:t>
+              </a:r>
+              <a:r>
+                <a:rPr kumimoji="1" lang="ja-JP" altLang="en-US" sz="600" dirty="0">
+                  <a:solidFill>
+                    <a:schemeClr val="tx1"/>
+                  </a:solidFill>
+                  <a:latin typeface="UD デジタル 教科書体 NP-R" panose="02020400000000000000" pitchFamily="18" charset="-128"/>
+                  <a:ea typeface="UD デジタル 教科書体 NP-R" panose="02020400000000000000" pitchFamily="18" charset="-128"/>
+                </a:rPr>
+                <a:t>：</a:t>
+              </a:r>
+              <a:r>
+                <a:rPr kumimoji="1" lang="en-US" altLang="ja-JP" sz="600" dirty="0">
+                  <a:solidFill>
+                    <a:schemeClr val="tx1"/>
+                  </a:solidFill>
+                  <a:latin typeface="UD デジタル 教科書体 NP-R" panose="02020400000000000000" pitchFamily="18" charset="-128"/>
+                  <a:ea typeface="UD デジタル 教科書体 NP-R" panose="02020400000000000000" pitchFamily="18" charset="-128"/>
+                </a:rPr>
+                <a:t>59</a:t>
+              </a:r>
+              <a:r>
+                <a:rPr kumimoji="1" lang="ja-JP" altLang="en-US" sz="600" dirty="0">
+                  <a:solidFill>
+                    <a:schemeClr val="tx1"/>
+                  </a:solidFill>
+                  <a:latin typeface="UD デジタル 教科書体 NP-R" panose="02020400000000000000" pitchFamily="18" charset="-128"/>
+                  <a:ea typeface="UD デジタル 教科書体 NP-R" panose="02020400000000000000" pitchFamily="18" charset="-128"/>
+                </a:rPr>
+                <a:t>まで］</a:t>
+              </a:r>
+            </a:p>
+          </p:txBody>
+        </p:sp>
+        <p:pic>
+          <p:nvPicPr>
+            <p:cNvPr id="3" name="図 2">
+              <a:extLst>
+                <a:ext uri="{FF2B5EF4-FFF2-40B4-BE49-F238E27FC236}">
+                  <a16:creationId xmlns:a16="http://schemas.microsoft.com/office/drawing/2014/main" id="{30784653-FBC6-D3E0-BA33-72F3C11EF578}"/>
+                </a:ext>
+              </a:extLst>
+            </p:cNvPr>
+            <p:cNvPicPr>
+              <a:picLocks noChangeAspect="1"/>
+            </p:cNvPicPr>
+            <p:nvPr/>
+          </p:nvPicPr>
+          <p:blipFill>
+            <a:blip r:embed="rId3">
+              <a:extLst>
+                <a:ext uri="{28A0092B-C50C-407E-A947-70E740481C1C}">
+                  <a14:useLocalDpi xmlns:a14="http://schemas.microsoft.com/office/drawing/2010/main" val="0"/>
+                </a:ext>
+              </a:extLst>
+            </a:blip>
+            <a:stretch>
+              <a:fillRect/>
+            </a:stretch>
+          </p:blipFill>
+          <p:spPr>
+            <a:xfrm>
+              <a:off x="267649" y="1749035"/>
+              <a:ext cx="111515" cy="111515"/>
+            </a:xfrm>
+            <a:prstGeom prst="rect">
+              <a:avLst/>
+            </a:prstGeom>
+          </p:spPr>
+        </p:pic>
+      </p:grpSp>
+      <p:sp>
+        <p:nvSpPr>
+          <p:cNvPr id="2" name="四角形: 角を丸くする 1">
+            <a:extLst>
+              <a:ext uri="{FF2B5EF4-FFF2-40B4-BE49-F238E27FC236}">
+                <a16:creationId xmlns:a16="http://schemas.microsoft.com/office/drawing/2014/main" id="{83A89654-52CD-8259-04C3-44FB7968F3C3}"/>
+              </a:ext>
+            </a:extLst>
+          </p:cNvPr>
+          <p:cNvSpPr/>
+          <p:nvPr/>
+        </p:nvSpPr>
+        <p:spPr>
+          <a:xfrm>
+            <a:off x="1060000" y="571575"/>
+            <a:ext cx="1429461" cy="215018"/>
+          </a:xfrm>
+          <a:prstGeom prst="roundRect">
+            <a:avLst>
+              <a:gd name="adj" fmla="val 6665"/>
+            </a:avLst>
+          </a:prstGeom>
+          <a:solidFill>
+            <a:schemeClr val="bg1"/>
+          </a:solidFill>
+          <a:ln>
+            <a:noFill/>
+          </a:ln>
+        </p:spPr>
+        <p:style>
+          <a:lnRef idx="2">
+            <a:schemeClr val="accent1">
+              <a:shade val="15000"/>
+            </a:schemeClr>
+          </a:lnRef>
+          <a:fillRef idx="1">
+            <a:schemeClr val="accent1"/>
+          </a:fillRef>
+          <a:effectRef idx="0">
+            <a:schemeClr val="accent1"/>
+          </a:effectRef>
+          <a:fontRef idx="minor">
+            <a:schemeClr val="lt1"/>
+          </a:fontRef>
+        </p:style>
+        <p:txBody>
+          <a:bodyPr lIns="0" tIns="0" rIns="0" bIns="0" rtlCol="0" anchor="ctr"/>
+          <a:lstStyle/>
+          <a:p>
+            <a:pPr algn="ctr"/>
+            <a:r>
+              <a:rPr lang="en-US" altLang="ja-JP" dirty="0">
+                <a:solidFill>
+                  <a:schemeClr val="tx1"/>
+                </a:solidFill>
+                <a:latin typeface="UD デジタル 教科書体 NP-R" panose="02020400000000000000" pitchFamily="18" charset="-128"/>
+                <a:ea typeface="UD デジタル 教科書体 NP-R" panose="02020400000000000000" pitchFamily="18" charset="-128"/>
+              </a:rPr>
+              <a:t>12345678</a:t>
+            </a:r>
+            <a:endParaRPr kumimoji="1" lang="ja-JP" altLang="en-US" sz="800" dirty="0">
+              <a:solidFill>
+                <a:schemeClr val="tx1"/>
+              </a:solidFill>
+              <a:latin typeface="UD デジタル 教科書体 NP-R" panose="02020400000000000000" pitchFamily="18" charset="-128"/>
+              <a:ea typeface="UD デジタル 教科書体 NP-R" panose="02020400000000000000" pitchFamily="18" charset="-128"/>
+            </a:endParaRPr>
+          </a:p>
+        </p:txBody>
+      </p:sp>
+    </p:spTree>
+    <p:extLst>
+      <p:ext uri="{BB962C8B-B14F-4D97-AF65-F5344CB8AC3E}">
+        <p14:creationId xmlns:p14="http://schemas.microsoft.com/office/powerpoint/2010/main" val="689486177"/>
+      </p:ext>
+    </p:extLst>
+  </p:cSld>
+  <p:clrMapOvr>
+    <a:masterClrMapping/>
+  </p:clrMapOvr>
+</p:sld>
+</file>
+
+<file path=ppt/slides/slide3.xml><?xml version="1.0" encoding="utf-8"?>
+<p:sld xmlns:a="http://schemas.openxmlformats.org/drawingml/2006/main" xmlns:r="http://schemas.openxmlformats.org/officeDocument/2006/relationships" xmlns:p="http://schemas.openxmlformats.org/presentationml/2006/main">
+  <p:cSld>
+    <p:spTree>
+      <p:nvGrpSpPr>
+        <p:cNvPr id="1" name=""/>
+        <p:cNvGrpSpPr/>
+        <p:nvPr/>
+      </p:nvGrpSpPr>
+      <p:grpSpPr>
+        <a:xfrm>
+          <a:off x="0" y="0"/>
+          <a:ext cx="0" cy="0"/>
+          <a:chOff x="0" y="0"/>
+          <a:chExt cx="0" cy="0"/>
+        </a:xfrm>
+      </p:grpSpPr>
+      <p:sp>
+        <p:nvSpPr>
+          <p:cNvPr id="2" name="タイトル 1">
+            <a:extLst>
+              <a:ext uri="{FF2B5EF4-FFF2-40B4-BE49-F238E27FC236}">
+                <a16:creationId xmlns:a16="http://schemas.microsoft.com/office/drawing/2014/main" id="{72A22F09-821C-2C3B-0E4F-1B630732FBD0}"/>
+              </a:ext>
+            </a:extLst>
+          </p:cNvPr>
+          <p:cNvSpPr>
+            <a:spLocks noGrp="1"/>
+          </p:cNvSpPr>
+          <p:nvPr>
+            <p:ph type="title"/>
+          </p:nvPr>
+        </p:nvSpPr>
+        <p:spPr/>
+        <p:txBody>
+          <a:bodyPr>
+            <a:normAutofit fontScale="90000"/>
+          </a:bodyPr>
+          <a:lstStyle/>
+          <a:p>
+            <a:r>
+              <a:rPr kumimoji="1" lang="ja-JP" altLang="en-US"/>
+              <a:t>以下参考</a:t>
+            </a:r>
+            <a:br>
+              <a:rPr kumimoji="1" lang="en-US" altLang="ja-JP" dirty="0"/>
+            </a:br>
+            <a:endParaRPr kumimoji="1" lang="ja-JP" altLang="en-US"/>
+          </a:p>
+        </p:txBody>
+      </p:sp>
+      <p:sp>
+        <p:nvSpPr>
+          <p:cNvPr id="3" name="コンテンツ プレースホルダー 2">
+            <a:extLst>
+              <a:ext uri="{FF2B5EF4-FFF2-40B4-BE49-F238E27FC236}">
+                <a16:creationId xmlns:a16="http://schemas.microsoft.com/office/drawing/2014/main" id="{87A49D1D-AFF0-7CD0-88E7-8E572A6A74A9}"/>
+              </a:ext>
+            </a:extLst>
+          </p:cNvPr>
+          <p:cNvSpPr>
+            <a:spLocks noGrp="1"/>
+          </p:cNvSpPr>
+          <p:nvPr>
+            <p:ph idx="1"/>
+          </p:nvPr>
+        </p:nvSpPr>
+        <p:spPr/>
+        <p:txBody>
+          <a:bodyPr/>
+          <a:lstStyle/>
+          <a:p>
+            <a:endParaRPr kumimoji="1" lang="ja-JP" altLang="en-US"/>
+          </a:p>
+        </p:txBody>
+      </p:sp>
+    </p:spTree>
+    <p:extLst>
+      <p:ext uri="{BB962C8B-B14F-4D97-AF65-F5344CB8AC3E}">
+        <p14:creationId xmlns:p14="http://schemas.microsoft.com/office/powerpoint/2010/main" val="4168954117"/>
+      </p:ext>
+    </p:extLst>
+  </p:cSld>
+  <p:clrMapOvr>
+    <a:masterClrMapping/>
+  </p:clrMapOvr>
+</p:sld>
+</file>
+
+<file path=ppt/slides/slide4.xml><?xml version="1.0" encoding="utf-8"?>
+<p:sld xmlns:a="http://schemas.openxmlformats.org/drawingml/2006/main" xmlns:r="http://schemas.openxmlformats.org/officeDocument/2006/relationships" xmlns:p="http://schemas.openxmlformats.org/presentationml/2006/main">
+  <p:cSld>
+    <p:spTree>
+      <p:nvGrpSpPr>
+        <p:cNvPr id="1" name="">
+          <a:extLst>
+            <a:ext uri="{FF2B5EF4-FFF2-40B4-BE49-F238E27FC236}">
               <a16:creationId xmlns:a16="http://schemas.microsoft.com/office/drawing/2014/main" id="{C0355DED-CAFD-3E98-07AB-448B244006B7}"/>
             </a:ext>
           </a:extLst>
@@ -5173,917 +6184,6 @@
 </p:sld>
 </file>
 
-<file path=ppt/slides/slide3.xml><?xml version="1.0" encoding="utf-8"?>
-<p:sld xmlns:a="http://schemas.openxmlformats.org/drawingml/2006/main" xmlns:r="http://schemas.openxmlformats.org/officeDocument/2006/relationships" xmlns:p="http://schemas.openxmlformats.org/presentationml/2006/main">
-  <p:cSld>
-    <p:spTree>
-      <p:nvGrpSpPr>
-        <p:cNvPr id="1" name="">
-          <a:extLst>
-            <a:ext uri="{FF2B5EF4-FFF2-40B4-BE49-F238E27FC236}">
-              <a16:creationId xmlns:a16="http://schemas.microsoft.com/office/drawing/2014/main" id="{D079A0A6-C627-E1EF-2C33-DA04DC22B202}"/>
-            </a:ext>
-          </a:extLst>
-        </p:cNvPr>
-        <p:cNvGrpSpPr/>
-        <p:nvPr/>
-      </p:nvGrpSpPr>
-      <p:grpSpPr>
-        <a:xfrm>
-          <a:off x="0" y="0"/>
-          <a:ext cx="0" cy="0"/>
-          <a:chOff x="0" y="0"/>
-          <a:chExt cx="0" cy="0"/>
-        </a:xfrm>
-      </p:grpSpPr>
-      <p:grpSp>
-        <p:nvGrpSpPr>
-          <p:cNvPr id="4" name="グループ化 3">
-            <a:extLst>
-              <a:ext uri="{FF2B5EF4-FFF2-40B4-BE49-F238E27FC236}">
-                <a16:creationId xmlns:a16="http://schemas.microsoft.com/office/drawing/2014/main" id="{3A011A14-8162-9C9E-72DA-74130FD97DCF}"/>
-              </a:ext>
-            </a:extLst>
-          </p:cNvPr>
-          <p:cNvGrpSpPr/>
-          <p:nvPr/>
-        </p:nvGrpSpPr>
-        <p:grpSpPr>
-          <a:xfrm>
-            <a:off x="-1" y="-5087"/>
-            <a:ext cx="3095625" cy="1949775"/>
-            <a:chOff x="-1" y="-5087"/>
-            <a:chExt cx="3095625" cy="1949775"/>
-          </a:xfrm>
-        </p:grpSpPr>
-        <p:sp>
-          <p:nvSpPr>
-            <p:cNvPr id="6" name="四角形: 角を丸くする 5">
-              <a:extLst>
-                <a:ext uri="{FF2B5EF4-FFF2-40B4-BE49-F238E27FC236}">
-                  <a16:creationId xmlns:a16="http://schemas.microsoft.com/office/drawing/2014/main" id="{60D33596-4E8C-FA2E-94F2-F225C44EF270}"/>
-                </a:ext>
-              </a:extLst>
-            </p:cNvPr>
-            <p:cNvSpPr/>
-            <p:nvPr/>
-          </p:nvSpPr>
-          <p:spPr>
-            <a:xfrm>
-              <a:off x="-1" y="-5087"/>
-              <a:ext cx="3095625" cy="1949774"/>
-            </a:xfrm>
-            <a:prstGeom prst="roundRect">
-              <a:avLst>
-                <a:gd name="adj" fmla="val 0"/>
-              </a:avLst>
-            </a:prstGeom>
-            <a:solidFill>
-              <a:schemeClr val="bg1"/>
-            </a:solidFill>
-            <a:ln>
-              <a:noFill/>
-            </a:ln>
-          </p:spPr>
-          <p:style>
-            <a:lnRef idx="2">
-              <a:schemeClr val="accent1">
-                <a:shade val="15000"/>
-              </a:schemeClr>
-            </a:lnRef>
-            <a:fillRef idx="1">
-              <a:schemeClr val="accent1"/>
-            </a:fillRef>
-            <a:effectRef idx="0">
-              <a:schemeClr val="accent1"/>
-            </a:effectRef>
-            <a:fontRef idx="minor">
-              <a:schemeClr val="lt1"/>
-            </a:fontRef>
-          </p:style>
-          <p:txBody>
-            <a:bodyPr lIns="0" tIns="0" rIns="0" bIns="0" rtlCol="0" anchor="ctr"/>
-            <a:lstStyle/>
-            <a:p>
-              <a:pPr algn="ctr"/>
-              <a:endParaRPr kumimoji="1" lang="ja-JP" altLang="en-US" sz="600" dirty="0">
-                <a:solidFill>
-                  <a:schemeClr val="tx1"/>
-                </a:solidFill>
-                <a:latin typeface="UD デジタル 教科書体 NP-R" panose="020B0400000000000000" pitchFamily="18" charset="-128"/>
-                <a:ea typeface="UD デジタル 教科書体 NP-R" panose="020B0400000000000000" pitchFamily="18" charset="-128"/>
-              </a:endParaRPr>
-            </a:p>
-          </p:txBody>
-        </p:sp>
-        <p:sp>
-          <p:nvSpPr>
-            <p:cNvPr id="27" name="四角形: 角を丸くする 26">
-              <a:extLst>
-                <a:ext uri="{FF2B5EF4-FFF2-40B4-BE49-F238E27FC236}">
-                  <a16:creationId xmlns:a16="http://schemas.microsoft.com/office/drawing/2014/main" id="{5720E82F-A8F7-2F33-47EE-2CB001A1ABD0}"/>
-                </a:ext>
-              </a:extLst>
-            </p:cNvPr>
-            <p:cNvSpPr/>
-            <p:nvPr/>
-          </p:nvSpPr>
-          <p:spPr>
-            <a:xfrm>
-              <a:off x="-1" y="0"/>
-              <a:ext cx="3095625" cy="1944688"/>
-            </a:xfrm>
-            <a:prstGeom prst="roundRect">
-              <a:avLst>
-                <a:gd name="adj" fmla="val 13559"/>
-              </a:avLst>
-            </a:prstGeom>
-            <a:noFill/>
-            <a:ln w="6350">
-              <a:noFill/>
-            </a:ln>
-            <a:effectLst/>
-          </p:spPr>
-          <p:style>
-            <a:lnRef idx="2">
-              <a:schemeClr val="accent1">
-                <a:shade val="15000"/>
-              </a:schemeClr>
-            </a:lnRef>
-            <a:fillRef idx="1">
-              <a:schemeClr val="accent1"/>
-            </a:fillRef>
-            <a:effectRef idx="0">
-              <a:schemeClr val="accent1"/>
-            </a:effectRef>
-            <a:fontRef idx="minor">
-              <a:schemeClr val="lt1"/>
-            </a:fontRef>
-          </p:style>
-          <p:txBody>
-            <a:bodyPr wrap="square" lIns="72000" tIns="36000" rIns="72000" bIns="0" rtlCol="0" anchor="b">
-              <a:noAutofit/>
-            </a:bodyPr>
-            <a:lstStyle/>
-            <a:p>
-              <a:pPr algn="ctr"/>
-              <a:endParaRPr kumimoji="1" lang="ja-JP" altLang="en-US" sz="600" dirty="0">
-                <a:solidFill>
-                  <a:schemeClr val="tx1"/>
-                </a:solidFill>
-                <a:latin typeface="UD デジタル 教科書体 NP-R" panose="02020400000000000000" pitchFamily="18" charset="-128"/>
-                <a:ea typeface="UD デジタル 教科書体 NP-R" panose="02020400000000000000" pitchFamily="18" charset="-128"/>
-              </a:endParaRPr>
-            </a:p>
-          </p:txBody>
-        </p:sp>
-        <p:sp>
-          <p:nvSpPr>
-            <p:cNvPr id="9" name="四角形: 角を丸くする 8">
-              <a:extLst>
-                <a:ext uri="{FF2B5EF4-FFF2-40B4-BE49-F238E27FC236}">
-                  <a16:creationId xmlns:a16="http://schemas.microsoft.com/office/drawing/2014/main" id="{39C7CB0D-A617-A539-722C-F7B2B115C35C}"/>
-                </a:ext>
-              </a:extLst>
-            </p:cNvPr>
-            <p:cNvSpPr/>
-            <p:nvPr/>
-          </p:nvSpPr>
-          <p:spPr>
-            <a:xfrm>
-              <a:off x="52384" y="86414"/>
-              <a:ext cx="2990852" cy="1165609"/>
-            </a:xfrm>
-            <a:prstGeom prst="roundRect">
-              <a:avLst>
-                <a:gd name="adj" fmla="val 14805"/>
-              </a:avLst>
-            </a:prstGeom>
-            <a:blipFill dpi="0" rotWithShape="1">
-              <a:blip r:embed="rId2"/>
-              <a:srcRect/>
-              <a:stretch>
-                <a:fillRect/>
-              </a:stretch>
-            </a:blipFill>
-            <a:ln w="171450">
-              <a:noFill/>
-            </a:ln>
-            <a:effectLst>
-              <a:glow>
-                <a:schemeClr val="bg1"/>
-              </a:glow>
-              <a:outerShdw dist="12700" sx="1000" sy="1000" algn="ctr" rotWithShape="0">
-                <a:srgbClr val="000000"/>
-              </a:outerShdw>
-              <a:softEdge rad="63500"/>
-            </a:effectLst>
-          </p:spPr>
-          <p:style>
-            <a:lnRef idx="2">
-              <a:schemeClr val="accent1">
-                <a:shade val="15000"/>
-              </a:schemeClr>
-            </a:lnRef>
-            <a:fillRef idx="1">
-              <a:schemeClr val="accent1"/>
-            </a:fillRef>
-            <a:effectRef idx="0">
-              <a:schemeClr val="accent1"/>
-            </a:effectRef>
-            <a:fontRef idx="minor">
-              <a:schemeClr val="lt1"/>
-            </a:fontRef>
-          </p:style>
-          <p:txBody>
-            <a:bodyPr rtlCol="0" anchor="ctr"/>
-            <a:lstStyle/>
-            <a:p>
-              <a:pPr algn="ctr"/>
-              <a:endParaRPr lang="ja-JP" altLang="en-US"/>
-            </a:p>
-          </p:txBody>
-        </p:sp>
-        <p:sp>
-          <p:nvSpPr>
-            <p:cNvPr id="16" name="四角形: 角を丸くする 15">
-              <a:extLst>
-                <a:ext uri="{FF2B5EF4-FFF2-40B4-BE49-F238E27FC236}">
-                  <a16:creationId xmlns:a16="http://schemas.microsoft.com/office/drawing/2014/main" id="{DA33354A-9C8E-023E-9E55-D19F0931C7E7}"/>
-                </a:ext>
-              </a:extLst>
-            </p:cNvPr>
-            <p:cNvSpPr/>
-            <p:nvPr/>
-          </p:nvSpPr>
-          <p:spPr>
-            <a:xfrm>
-              <a:off x="234235" y="250086"/>
-              <a:ext cx="2627152" cy="843154"/>
-            </a:xfrm>
-            <a:prstGeom prst="roundRect">
-              <a:avLst>
-                <a:gd name="adj" fmla="val 13559"/>
-              </a:avLst>
-            </a:prstGeom>
-            <a:solidFill>
-              <a:schemeClr val="bg1"/>
-            </a:solidFill>
-            <a:ln w="6350">
-              <a:noFill/>
-            </a:ln>
-            <a:effectLst/>
-          </p:spPr>
-          <p:style>
-            <a:lnRef idx="2">
-              <a:schemeClr val="accent1">
-                <a:shade val="15000"/>
-              </a:schemeClr>
-            </a:lnRef>
-            <a:fillRef idx="1">
-              <a:schemeClr val="accent1"/>
-            </a:fillRef>
-            <a:effectRef idx="0">
-              <a:schemeClr val="accent1"/>
-            </a:effectRef>
-            <a:fontRef idx="minor">
-              <a:schemeClr val="lt1"/>
-            </a:fontRef>
-          </p:style>
-          <p:txBody>
-            <a:bodyPr wrap="square" lIns="72000" tIns="36000" rIns="72000" bIns="0" rtlCol="0" anchor="b">
-              <a:noAutofit/>
-            </a:bodyPr>
-            <a:lstStyle/>
-            <a:p>
-              <a:pPr algn="ctr"/>
-              <a:r>
-                <a:rPr kumimoji="1" lang="ja-JP" altLang="en-US" sz="500" dirty="0">
-                  <a:solidFill>
-                    <a:schemeClr val="tx1"/>
-                  </a:solidFill>
-                  <a:latin typeface="UD デジタル 教科書体 NP-R" panose="02020400000000000000" pitchFamily="18" charset="-128"/>
-                  <a:ea typeface="UD デジタル 教科書体 NP-R" panose="02020400000000000000" pitchFamily="18" charset="-128"/>
-                </a:rPr>
-                <a:t>本カードを破損・紛失された場合、または使用期限を過ぎた場合は、お品ものを</a:t>
-              </a:r>
-              <a:endParaRPr kumimoji="1" lang="en-US" altLang="ja-JP" sz="500" dirty="0">
-                <a:solidFill>
-                  <a:schemeClr val="tx1"/>
-                </a:solidFill>
-                <a:latin typeface="UD デジタル 教科書体 NP-R" panose="02020400000000000000" pitchFamily="18" charset="-128"/>
-                <a:ea typeface="UD デジタル 教科書体 NP-R" panose="02020400000000000000" pitchFamily="18" charset="-128"/>
-              </a:endParaRPr>
-            </a:p>
-            <a:p>
-              <a:pPr algn="ctr"/>
-              <a:r>
-                <a:rPr kumimoji="1" lang="ja-JP" altLang="en-US" sz="500" dirty="0">
-                  <a:solidFill>
-                    <a:schemeClr val="tx1"/>
-                  </a:solidFill>
-                  <a:latin typeface="UD デジタル 教科書体 NP-R" panose="02020400000000000000" pitchFamily="18" charset="-128"/>
-                  <a:ea typeface="UD デジタル 教科書体 NP-R" panose="02020400000000000000" pitchFamily="18" charset="-128"/>
-                </a:rPr>
-                <a:t>  ご提供できかねますので、あらかじめご了承くださいますようお願いいたします。</a:t>
-              </a:r>
-            </a:p>
-          </p:txBody>
-        </p:sp>
-        <p:sp>
-          <p:nvSpPr>
-            <p:cNvPr id="5" name="四角形: 角を丸くする 4">
-              <a:extLst>
-                <a:ext uri="{FF2B5EF4-FFF2-40B4-BE49-F238E27FC236}">
-                  <a16:creationId xmlns:a16="http://schemas.microsoft.com/office/drawing/2014/main" id="{E41946D8-7389-75F2-4C11-940CF115873C}"/>
-                </a:ext>
-              </a:extLst>
-            </p:cNvPr>
-            <p:cNvSpPr/>
-            <p:nvPr/>
-          </p:nvSpPr>
-          <p:spPr>
-            <a:xfrm>
-              <a:off x="299236" y="559911"/>
-              <a:ext cx="564212" cy="211760"/>
-            </a:xfrm>
-            <a:prstGeom prst="roundRect">
-              <a:avLst>
-                <a:gd name="adj" fmla="val 6665"/>
-              </a:avLst>
-            </a:prstGeom>
-            <a:solidFill>
-              <a:schemeClr val="bg1"/>
-            </a:solidFill>
-            <a:ln>
-              <a:noFill/>
-            </a:ln>
-          </p:spPr>
-          <p:style>
-            <a:lnRef idx="2">
-              <a:schemeClr val="accent1">
-                <a:shade val="15000"/>
-              </a:schemeClr>
-            </a:lnRef>
-            <a:fillRef idx="1">
-              <a:schemeClr val="accent1"/>
-            </a:fillRef>
-            <a:effectRef idx="0">
-              <a:schemeClr val="accent1"/>
-            </a:effectRef>
-            <a:fontRef idx="minor">
-              <a:schemeClr val="lt1"/>
-            </a:fontRef>
-          </p:style>
-          <p:txBody>
-            <a:bodyPr lIns="0" tIns="0" rIns="0" bIns="0" rtlCol="0" anchor="ctr"/>
-            <a:lstStyle/>
-            <a:p>
-              <a:pPr algn="ctr"/>
-              <a:r>
-                <a:rPr kumimoji="1" lang="en-US" altLang="ja-JP" sz="800" dirty="0">
-                  <a:solidFill>
-                    <a:schemeClr val="tx1"/>
-                  </a:solidFill>
-                  <a:latin typeface="UD デジタル 教科書体 NP-R" panose="02020400000000000000" pitchFamily="18" charset="-128"/>
-                  <a:ea typeface="UD デジタル 教科書体 NP-R" panose="02020400000000000000" pitchFamily="18" charset="-128"/>
-                </a:rPr>
-                <a:t>PINCODE</a:t>
-              </a:r>
-            </a:p>
-          </p:txBody>
-        </p:sp>
-        <p:sp>
-          <p:nvSpPr>
-            <p:cNvPr id="18" name="四角形: 角を丸くする 17">
-              <a:extLst>
-                <a:ext uri="{FF2B5EF4-FFF2-40B4-BE49-F238E27FC236}">
-                  <a16:creationId xmlns:a16="http://schemas.microsoft.com/office/drawing/2014/main" id="{4CDE62F3-3BB3-74A0-99E7-D86D84B26F9B}"/>
-                </a:ext>
-              </a:extLst>
-            </p:cNvPr>
-            <p:cNvSpPr/>
-            <p:nvPr/>
-          </p:nvSpPr>
-          <p:spPr>
-            <a:xfrm>
-              <a:off x="216692" y="1346585"/>
-              <a:ext cx="2662238" cy="302565"/>
-            </a:xfrm>
-            <a:prstGeom prst="roundRect">
-              <a:avLst>
-                <a:gd name="adj" fmla="val 17073"/>
-              </a:avLst>
-            </a:prstGeom>
-            <a:noFill/>
-            <a:ln w="6350">
-              <a:solidFill>
-                <a:schemeClr val="tx1"/>
-              </a:solidFill>
-            </a:ln>
-            <a:effectLst/>
-          </p:spPr>
-          <p:style>
-            <a:lnRef idx="2">
-              <a:schemeClr val="accent1">
-                <a:shade val="15000"/>
-              </a:schemeClr>
-            </a:lnRef>
-            <a:fillRef idx="1">
-              <a:schemeClr val="accent1"/>
-            </a:fillRef>
-            <a:effectRef idx="0">
-              <a:schemeClr val="accent1"/>
-            </a:effectRef>
-            <a:fontRef idx="minor">
-              <a:schemeClr val="lt1"/>
-            </a:fontRef>
-          </p:style>
-          <p:txBody>
-            <a:bodyPr rtlCol="0" anchor="ctr"/>
-            <a:lstStyle/>
-            <a:p>
-              <a:pPr algn="ctr"/>
-              <a:r>
-                <a:rPr kumimoji="1" lang="en-US" altLang="ja-JP" sz="600" dirty="0">
-                  <a:solidFill>
-                    <a:schemeClr val="tx1"/>
-                  </a:solidFill>
-                  <a:latin typeface="UD デジタル 教科書体 NP-R" panose="02020400000000000000" pitchFamily="18" charset="-128"/>
-                  <a:ea typeface="UD デジタル 教科書体 NP-R" panose="02020400000000000000" pitchFamily="18" charset="-128"/>
-                </a:rPr>
-                <a:t>[</a:t>
-              </a:r>
-              <a:r>
-                <a:rPr kumimoji="1" lang="ja-JP" altLang="en-US" sz="600" dirty="0">
-                  <a:solidFill>
-                    <a:schemeClr val="tx1"/>
-                  </a:solidFill>
-                  <a:latin typeface="UD デジタル 教科書体 NP-R" panose="02020400000000000000" pitchFamily="18" charset="-128"/>
-                  <a:ea typeface="UD デジタル 教科書体 NP-R" panose="02020400000000000000" pitchFamily="18" charset="-128"/>
-                </a:rPr>
-                <a:t>お問い合わせ</a:t>
-              </a:r>
-              <a:r>
-                <a:rPr kumimoji="1" lang="en-US" altLang="ja-JP" sz="600" dirty="0">
-                  <a:solidFill>
-                    <a:schemeClr val="tx1"/>
-                  </a:solidFill>
-                  <a:latin typeface="UD デジタル 教科書体 NP-R" panose="02020400000000000000" pitchFamily="18" charset="-128"/>
-                  <a:ea typeface="UD デジタル 教科書体 NP-R" panose="02020400000000000000" pitchFamily="18" charset="-128"/>
-                </a:rPr>
-                <a:t>]</a:t>
-              </a:r>
-            </a:p>
-            <a:p>
-              <a:pPr algn="ctr"/>
-              <a:r>
-                <a:rPr kumimoji="1" lang="ja-JP" altLang="en-US" sz="600" dirty="0">
-                  <a:solidFill>
-                    <a:schemeClr val="tx1"/>
-                  </a:solidFill>
-                  <a:latin typeface="UD デジタル 教科書体 NP-R" panose="02020400000000000000" pitchFamily="18" charset="-128"/>
-                  <a:ea typeface="UD デジタル 教科書体 NP-R" panose="02020400000000000000" pitchFamily="18" charset="-128"/>
-                </a:rPr>
-                <a:t>秋田大学総務企画部広報課</a:t>
-              </a:r>
-            </a:p>
-            <a:p>
-              <a:pPr algn="ctr"/>
-              <a:r>
-                <a:rPr kumimoji="1" lang="ja-JP" altLang="en-US" sz="600" dirty="0">
-                  <a:solidFill>
-                    <a:schemeClr val="tx1"/>
-                  </a:solidFill>
-                  <a:latin typeface="UD デジタル 教科書体 NP-R" panose="02020400000000000000" pitchFamily="18" charset="-128"/>
-                  <a:ea typeface="UD デジタル 教科書体 NP-R" panose="02020400000000000000" pitchFamily="18" charset="-128"/>
-                </a:rPr>
-                <a:t>電話：</a:t>
-              </a:r>
-              <a:r>
-                <a:rPr kumimoji="1" lang="en-US" altLang="ja-JP" sz="600" dirty="0">
-                  <a:solidFill>
-                    <a:schemeClr val="tx1"/>
-                  </a:solidFill>
-                  <a:latin typeface="UD デジタル 教科書体 NP-R" panose="02020400000000000000" pitchFamily="18" charset="-128"/>
-                  <a:ea typeface="UD デジタル 教科書体 NP-R" panose="02020400000000000000" pitchFamily="18" charset="-128"/>
-                </a:rPr>
-                <a:t>018-889-3018</a:t>
-              </a:r>
-              <a:r>
-                <a:rPr kumimoji="1" lang="ja-JP" altLang="en-US" sz="600" dirty="0">
-                  <a:solidFill>
-                    <a:schemeClr val="tx1"/>
-                  </a:solidFill>
-                  <a:latin typeface="UD デジタル 教科書体 NP-R" panose="02020400000000000000" pitchFamily="18" charset="-128"/>
-                  <a:ea typeface="UD デジタル 教科書体 NP-R" panose="02020400000000000000" pitchFamily="18" charset="-128"/>
-                </a:rPr>
-                <a:t>　</a:t>
-              </a:r>
-              <a:r>
-                <a:rPr kumimoji="1" lang="en-US" altLang="ja-JP" sz="600" dirty="0">
-                  <a:solidFill>
-                    <a:schemeClr val="tx1"/>
-                  </a:solidFill>
-                  <a:latin typeface="UD デジタル 教科書体 NP-R" panose="02020400000000000000" pitchFamily="18" charset="-128"/>
-                  <a:ea typeface="UD デジタル 教科書体 NP-R" panose="02020400000000000000" pitchFamily="18" charset="-128"/>
-                </a:rPr>
-                <a:t>e-mail</a:t>
-              </a:r>
-              <a:r>
-                <a:rPr kumimoji="1" lang="ja-JP" altLang="en-US" sz="600" dirty="0">
-                  <a:solidFill>
-                    <a:schemeClr val="tx1"/>
-                  </a:solidFill>
-                  <a:latin typeface="UD デジタル 教科書体 NP-R" panose="02020400000000000000" pitchFamily="18" charset="-128"/>
-                  <a:ea typeface="UD デジタル 教科書体 NP-R" panose="02020400000000000000" pitchFamily="18" charset="-128"/>
-                </a:rPr>
-                <a:t>：</a:t>
-              </a:r>
-              <a:r>
-                <a:rPr kumimoji="1" lang="en-US" altLang="ja-JP" sz="600" dirty="0">
-                  <a:solidFill>
-                    <a:schemeClr val="tx1"/>
-                  </a:solidFill>
-                  <a:latin typeface="UD デジタル 教科書体 NP-R" panose="02020400000000000000" pitchFamily="18" charset="-128"/>
-                  <a:ea typeface="UD デジタル 教科書体 NP-R" panose="02020400000000000000" pitchFamily="18" charset="-128"/>
-                </a:rPr>
-                <a:t>kouhou@jimu.akita-u.ac.jp</a:t>
-              </a:r>
-            </a:p>
-          </p:txBody>
-        </p:sp>
-        <p:sp>
-          <p:nvSpPr>
-            <p:cNvPr id="19" name="四角形: 角を丸くする 18">
-              <a:extLst>
-                <a:ext uri="{FF2B5EF4-FFF2-40B4-BE49-F238E27FC236}">
-                  <a16:creationId xmlns:a16="http://schemas.microsoft.com/office/drawing/2014/main" id="{31B99F23-31CE-7A6B-4F83-670E40C768CA}"/>
-                </a:ext>
-              </a:extLst>
-            </p:cNvPr>
-            <p:cNvSpPr/>
-            <p:nvPr/>
-          </p:nvSpPr>
-          <p:spPr>
-            <a:xfrm>
-              <a:off x="264474" y="1746083"/>
-              <a:ext cx="2720550" cy="131546"/>
-            </a:xfrm>
-            <a:prstGeom prst="roundRect">
-              <a:avLst>
-                <a:gd name="adj" fmla="val 17073"/>
-              </a:avLst>
-            </a:prstGeom>
-            <a:noFill/>
-            <a:ln w="6350">
-              <a:noFill/>
-            </a:ln>
-            <a:effectLst/>
-          </p:spPr>
-          <p:style>
-            <a:lnRef idx="2">
-              <a:schemeClr val="accent1">
-                <a:shade val="15000"/>
-              </a:schemeClr>
-            </a:lnRef>
-            <a:fillRef idx="1">
-              <a:schemeClr val="accent1"/>
-            </a:fillRef>
-            <a:effectRef idx="0">
-              <a:schemeClr val="accent1"/>
-            </a:effectRef>
-            <a:fontRef idx="minor">
-              <a:schemeClr val="lt1"/>
-            </a:fontRef>
-          </p:style>
-          <p:txBody>
-            <a:bodyPr rtlCol="0" anchor="ctr"/>
-            <a:lstStyle/>
-            <a:p>
-              <a:pPr algn="ctr"/>
-              <a:r>
-                <a:rPr kumimoji="1" lang="ja-JP" altLang="en-US" sz="600" dirty="0">
-                  <a:solidFill>
-                    <a:schemeClr val="tx1"/>
-                  </a:solidFill>
-                  <a:latin typeface="UD デジタル 教科書体 NP-R" panose="02020400000000000000" pitchFamily="18" charset="-128"/>
-                  <a:ea typeface="UD デジタル 教科書体 NP-R" panose="02020400000000000000" pitchFamily="18" charset="-128"/>
-                </a:rPr>
-                <a:t>「名刺代わりに」は、秋田大学発ベンチャー、</a:t>
-              </a:r>
-              <a:r>
-                <a:rPr kumimoji="1" lang="en-US" altLang="ja-JP" sz="600" dirty="0">
-                  <a:solidFill>
-                    <a:schemeClr val="tx1"/>
-                  </a:solidFill>
-                  <a:latin typeface="UD デジタル 教科書体 NP-R" panose="02020400000000000000" pitchFamily="18" charset="-128"/>
-                  <a:ea typeface="UD デジタル 教科書体 NP-R" panose="02020400000000000000" pitchFamily="18" charset="-128"/>
-                </a:rPr>
-                <a:t>AUIC</a:t>
-              </a:r>
-              <a:r>
-                <a:rPr kumimoji="1" lang="ja-JP" altLang="en-US" sz="600" dirty="0">
-                  <a:solidFill>
-                    <a:schemeClr val="tx1"/>
-                  </a:solidFill>
-                  <a:latin typeface="UD デジタル 教科書体 NP-R" panose="02020400000000000000" pitchFamily="18" charset="-128"/>
-                  <a:ea typeface="UD デジタル 教科書体 NP-R" panose="02020400000000000000" pitchFamily="18" charset="-128"/>
-                </a:rPr>
-                <a:t>が提供しています。</a:t>
-              </a:r>
-              <a:endParaRPr kumimoji="1" lang="en-US" altLang="ja-JP" sz="600" dirty="0">
-                <a:solidFill>
-                  <a:schemeClr val="tx1"/>
-                </a:solidFill>
-                <a:latin typeface="UD デジタル 教科書体 NP-R" panose="02020400000000000000" pitchFamily="18" charset="-128"/>
-                <a:ea typeface="UD デジタル 教科書体 NP-R" panose="02020400000000000000" pitchFamily="18" charset="-128"/>
-              </a:endParaRPr>
-            </a:p>
-          </p:txBody>
-        </p:sp>
-        <p:sp>
-          <p:nvSpPr>
-            <p:cNvPr id="25" name="四角形: 角を丸くする 24">
-              <a:extLst>
-                <a:ext uri="{FF2B5EF4-FFF2-40B4-BE49-F238E27FC236}">
-                  <a16:creationId xmlns:a16="http://schemas.microsoft.com/office/drawing/2014/main" id="{307D546E-1FFF-E8A2-17B1-EEC4D1AACAE0}"/>
-                </a:ext>
-              </a:extLst>
-            </p:cNvPr>
-            <p:cNvSpPr/>
-            <p:nvPr/>
-          </p:nvSpPr>
-          <p:spPr>
-            <a:xfrm>
-              <a:off x="187535" y="287429"/>
-              <a:ext cx="2720550" cy="164630"/>
-            </a:xfrm>
-            <a:prstGeom prst="roundRect">
-              <a:avLst>
-                <a:gd name="adj" fmla="val 17073"/>
-              </a:avLst>
-            </a:prstGeom>
-            <a:noFill/>
-            <a:ln w="6350">
-              <a:noFill/>
-            </a:ln>
-            <a:effectLst/>
-          </p:spPr>
-          <p:style>
-            <a:lnRef idx="2">
-              <a:schemeClr val="accent1">
-                <a:shade val="15000"/>
-              </a:schemeClr>
-            </a:lnRef>
-            <a:fillRef idx="1">
-              <a:schemeClr val="accent1"/>
-            </a:fillRef>
-            <a:effectRef idx="0">
-              <a:schemeClr val="accent1"/>
-            </a:effectRef>
-            <a:fontRef idx="minor">
-              <a:schemeClr val="lt1"/>
-            </a:fontRef>
-          </p:style>
-          <p:txBody>
-            <a:bodyPr rtlCol="0" anchor="ctr"/>
-            <a:lstStyle/>
-            <a:p>
-              <a:pPr algn="ctr"/>
-              <a:r>
-                <a:rPr kumimoji="1" lang="ja-JP" altLang="en-US" sz="600" dirty="0">
-                  <a:solidFill>
-                    <a:schemeClr val="tx1"/>
-                  </a:solidFill>
-                  <a:latin typeface="UD デジタル 教科書体 NP-R" panose="02020400000000000000" pitchFamily="18" charset="-128"/>
-                  <a:ea typeface="UD デジタル 教科書体 NP-R" panose="02020400000000000000" pitchFamily="18" charset="-128"/>
-                </a:rPr>
-                <a:t>［使用期限：</a:t>
-              </a:r>
-              <a:r>
-                <a:rPr kumimoji="1" lang="en-US" altLang="ja-JP" sz="600" dirty="0">
-                  <a:solidFill>
-                    <a:schemeClr val="tx1"/>
-                  </a:solidFill>
-                  <a:latin typeface="UD デジタル 教科書体 NP-R" panose="02020400000000000000" pitchFamily="18" charset="-128"/>
-                  <a:ea typeface="UD デジタル 教科書体 NP-R" panose="02020400000000000000" pitchFamily="18" charset="-128"/>
-                </a:rPr>
-                <a:t>2027</a:t>
-              </a:r>
-              <a:r>
-                <a:rPr kumimoji="1" lang="ja-JP" altLang="en-US" sz="600" dirty="0">
-                  <a:solidFill>
-                    <a:schemeClr val="tx1"/>
-                  </a:solidFill>
-                  <a:latin typeface="UD デジタル 教科書体 NP-R" panose="02020400000000000000" pitchFamily="18" charset="-128"/>
-                  <a:ea typeface="UD デジタル 教科書体 NP-R" panose="02020400000000000000" pitchFamily="18" charset="-128"/>
-                </a:rPr>
-                <a:t> 年 </a:t>
-              </a:r>
-              <a:r>
-                <a:rPr kumimoji="1" lang="en-US" altLang="ja-JP" sz="600" dirty="0">
-                  <a:solidFill>
-                    <a:schemeClr val="tx1"/>
-                  </a:solidFill>
-                  <a:latin typeface="UD デジタル 教科書体 NP-R" panose="02020400000000000000" pitchFamily="18" charset="-128"/>
-                  <a:ea typeface="UD デジタル 教科書体 NP-R" panose="02020400000000000000" pitchFamily="18" charset="-128"/>
-                </a:rPr>
-                <a:t>3</a:t>
-              </a:r>
-              <a:r>
-                <a:rPr kumimoji="1" lang="ja-JP" altLang="en-US" sz="600" dirty="0">
-                  <a:solidFill>
-                    <a:schemeClr val="tx1"/>
-                  </a:solidFill>
-                  <a:latin typeface="UD デジタル 教科書体 NP-R" panose="02020400000000000000" pitchFamily="18" charset="-128"/>
-                  <a:ea typeface="UD デジタル 教科書体 NP-R" panose="02020400000000000000" pitchFamily="18" charset="-128"/>
-                </a:rPr>
-                <a:t> 月 </a:t>
-              </a:r>
-              <a:r>
-                <a:rPr kumimoji="1" lang="en-US" altLang="ja-JP" sz="600" dirty="0">
-                  <a:solidFill>
-                    <a:schemeClr val="tx1"/>
-                  </a:solidFill>
-                  <a:latin typeface="UD デジタル 教科書体 NP-R" panose="02020400000000000000" pitchFamily="18" charset="-128"/>
-                  <a:ea typeface="UD デジタル 教科書体 NP-R" panose="02020400000000000000" pitchFamily="18" charset="-128"/>
-                </a:rPr>
-                <a:t>31</a:t>
-              </a:r>
-              <a:r>
-                <a:rPr kumimoji="1" lang="ja-JP" altLang="en-US" sz="600" dirty="0">
-                  <a:solidFill>
-                    <a:schemeClr val="tx1"/>
-                  </a:solidFill>
-                  <a:latin typeface="UD デジタル 教科書体 NP-R" panose="02020400000000000000" pitchFamily="18" charset="-128"/>
-                  <a:ea typeface="UD デジタル 教科書体 NP-R" panose="02020400000000000000" pitchFamily="18" charset="-128"/>
-                </a:rPr>
-                <a:t> 日 </a:t>
-              </a:r>
-              <a:r>
-                <a:rPr kumimoji="1" lang="en-US" altLang="ja-JP" sz="600" dirty="0">
-                  <a:solidFill>
-                    <a:schemeClr val="tx1"/>
-                  </a:solidFill>
-                  <a:latin typeface="UD デジタル 教科書体 NP-R" panose="02020400000000000000" pitchFamily="18" charset="-128"/>
-                  <a:ea typeface="UD デジタル 教科書体 NP-R" panose="02020400000000000000" pitchFamily="18" charset="-128"/>
-                </a:rPr>
-                <a:t>23</a:t>
-              </a:r>
-              <a:r>
-                <a:rPr kumimoji="1" lang="ja-JP" altLang="en-US" sz="600" dirty="0">
-                  <a:solidFill>
-                    <a:schemeClr val="tx1"/>
-                  </a:solidFill>
-                  <a:latin typeface="UD デジタル 教科書体 NP-R" panose="02020400000000000000" pitchFamily="18" charset="-128"/>
-                  <a:ea typeface="UD デジタル 教科書体 NP-R" panose="02020400000000000000" pitchFamily="18" charset="-128"/>
-                </a:rPr>
-                <a:t>：</a:t>
-              </a:r>
-              <a:r>
-                <a:rPr kumimoji="1" lang="en-US" altLang="ja-JP" sz="600" dirty="0">
-                  <a:solidFill>
-                    <a:schemeClr val="tx1"/>
-                  </a:solidFill>
-                  <a:latin typeface="UD デジタル 教科書体 NP-R" panose="02020400000000000000" pitchFamily="18" charset="-128"/>
-                  <a:ea typeface="UD デジタル 教科書体 NP-R" panose="02020400000000000000" pitchFamily="18" charset="-128"/>
-                </a:rPr>
-                <a:t>59</a:t>
-              </a:r>
-              <a:r>
-                <a:rPr kumimoji="1" lang="ja-JP" altLang="en-US" sz="600" dirty="0">
-                  <a:solidFill>
-                    <a:schemeClr val="tx1"/>
-                  </a:solidFill>
-                  <a:latin typeface="UD デジタル 教科書体 NP-R" panose="02020400000000000000" pitchFamily="18" charset="-128"/>
-                  <a:ea typeface="UD デジタル 教科書体 NP-R" panose="02020400000000000000" pitchFamily="18" charset="-128"/>
-                </a:rPr>
-                <a:t>まで］</a:t>
-              </a:r>
-            </a:p>
-          </p:txBody>
-        </p:sp>
-        <p:pic>
-          <p:nvPicPr>
-            <p:cNvPr id="3" name="図 2">
-              <a:extLst>
-                <a:ext uri="{FF2B5EF4-FFF2-40B4-BE49-F238E27FC236}">
-                  <a16:creationId xmlns:a16="http://schemas.microsoft.com/office/drawing/2014/main" id="{30784653-FBC6-D3E0-BA33-72F3C11EF578}"/>
-                </a:ext>
-              </a:extLst>
-            </p:cNvPr>
-            <p:cNvPicPr>
-              <a:picLocks noChangeAspect="1"/>
-            </p:cNvPicPr>
-            <p:nvPr/>
-          </p:nvPicPr>
-          <p:blipFill>
-            <a:blip r:embed="rId3">
-              <a:extLst>
-                <a:ext uri="{28A0092B-C50C-407E-A947-70E740481C1C}">
-                  <a14:useLocalDpi xmlns:a14="http://schemas.microsoft.com/office/drawing/2010/main" val="0"/>
-                </a:ext>
-              </a:extLst>
-            </a:blip>
-            <a:stretch>
-              <a:fillRect/>
-            </a:stretch>
-          </p:blipFill>
-          <p:spPr>
-            <a:xfrm>
-              <a:off x="267649" y="1749035"/>
-              <a:ext cx="111515" cy="111515"/>
-            </a:xfrm>
-            <a:prstGeom prst="rect">
-              <a:avLst/>
-            </a:prstGeom>
-          </p:spPr>
-        </p:pic>
-      </p:grpSp>
-      <p:sp>
-        <p:nvSpPr>
-          <p:cNvPr id="2" name="四角形: 角を丸くする 1">
-            <a:extLst>
-              <a:ext uri="{FF2B5EF4-FFF2-40B4-BE49-F238E27FC236}">
-                <a16:creationId xmlns:a16="http://schemas.microsoft.com/office/drawing/2014/main" id="{83A89654-52CD-8259-04C3-44FB7968F3C3}"/>
-              </a:ext>
-            </a:extLst>
-          </p:cNvPr>
-          <p:cNvSpPr/>
-          <p:nvPr/>
-        </p:nvSpPr>
-        <p:spPr>
-          <a:xfrm>
-            <a:off x="1060000" y="571575"/>
-            <a:ext cx="1429461" cy="215018"/>
-          </a:xfrm>
-          <a:prstGeom prst="roundRect">
-            <a:avLst>
-              <a:gd name="adj" fmla="val 6665"/>
-            </a:avLst>
-          </a:prstGeom>
-          <a:solidFill>
-            <a:schemeClr val="bg1"/>
-          </a:solidFill>
-          <a:ln>
-            <a:noFill/>
-          </a:ln>
-        </p:spPr>
-        <p:style>
-          <a:lnRef idx="2">
-            <a:schemeClr val="accent1">
-              <a:shade val="15000"/>
-            </a:schemeClr>
-          </a:lnRef>
-          <a:fillRef idx="1">
-            <a:schemeClr val="accent1"/>
-          </a:fillRef>
-          <a:effectRef idx="0">
-            <a:schemeClr val="accent1"/>
-          </a:effectRef>
-          <a:fontRef idx="minor">
-            <a:schemeClr val="lt1"/>
-          </a:fontRef>
-        </p:style>
-        <p:txBody>
-          <a:bodyPr lIns="0" tIns="0" rIns="0" bIns="0" rtlCol="0" anchor="ctr"/>
-          <a:lstStyle/>
-          <a:p>
-            <a:pPr algn="ctr"/>
-            <a:r>
-              <a:rPr lang="en-US" altLang="ja-JP" dirty="0">
-                <a:solidFill>
-                  <a:schemeClr val="tx1"/>
-                </a:solidFill>
-                <a:latin typeface="UD デジタル 教科書体 NP-R" panose="02020400000000000000" pitchFamily="18" charset="-128"/>
-                <a:ea typeface="UD デジタル 教科書体 NP-R" panose="02020400000000000000" pitchFamily="18" charset="-128"/>
-              </a:rPr>
-              <a:t>12345678</a:t>
-            </a:r>
-            <a:endParaRPr kumimoji="1" lang="ja-JP" altLang="en-US" sz="800" dirty="0">
-              <a:solidFill>
-                <a:schemeClr val="tx1"/>
-              </a:solidFill>
-              <a:latin typeface="UD デジタル 教科書体 NP-R" panose="02020400000000000000" pitchFamily="18" charset="-128"/>
-              <a:ea typeface="UD デジタル 教科書体 NP-R" panose="02020400000000000000" pitchFamily="18" charset="-128"/>
-            </a:endParaRPr>
-          </a:p>
-        </p:txBody>
-      </p:sp>
-    </p:spTree>
-    <p:extLst>
-      <p:ext uri="{BB962C8B-B14F-4D97-AF65-F5344CB8AC3E}">
-        <p14:creationId xmlns:p14="http://schemas.microsoft.com/office/powerpoint/2010/main" val="689486177"/>
-      </p:ext>
-    </p:extLst>
-  </p:cSld>
-  <p:clrMapOvr>
-    <a:masterClrMapping/>
-  </p:clrMapOvr>
-</p:sld>
-</file>
-
 <file path=ppt/theme/theme1.xml><?xml version="1.0" encoding="utf-8"?>
 <a:theme xmlns:a="http://schemas.openxmlformats.org/drawingml/2006/main" name="Office テーマ">
   <a:themeElements>
